--- a/docs/presentations/30-day-readout.pptx
+++ b/docs/presentations/30-day-readout.pptx
@@ -3371,7 +3371,7 @@
                 </a:solidFill>
                 <a:latin typeface="Open Sans Condensed"/>
               </a:rPr>
-              <a:t>KPMG</a:t>
+              <a:t>SLA</a:t>
             </a:r>
           </a:p>
         </p:txBody>
